--- a/ゲーム科2年/00_前期/ゲーム開発Ⅰ/ゲーム数学Ⅱ/座学/10_回転行列.pptx
+++ b/ゲーム科2年/00_前期/ゲーム開発Ⅰ/ゲーム数学Ⅱ/座学/10_回転行列.pptx
@@ -269,7 +269,7 @@
           <a:p>
             <a:fld id="{E9CC885B-4903-4D54-9A93-00025F12DED9}" type="datetimeFigureOut">
               <a:rPr kumimoji="1" lang="ja-JP" altLang="en-US" smtClean="0"/>
-              <a:t>2024/11/19</a:t>
+              <a:t>2025/4/9</a:t>
             </a:fld>
             <a:endParaRPr kumimoji="1" lang="ja-JP" altLang="en-US"/>
           </a:p>
@@ -499,7 +499,7 @@
           <a:p>
             <a:fld id="{E9CC885B-4903-4D54-9A93-00025F12DED9}" type="datetimeFigureOut">
               <a:rPr kumimoji="1" lang="ja-JP" altLang="en-US" smtClean="0"/>
-              <a:t>2024/11/19</a:t>
+              <a:t>2025/4/9</a:t>
             </a:fld>
             <a:endParaRPr kumimoji="1" lang="ja-JP" altLang="en-US"/>
           </a:p>
@@ -739,7 +739,7 @@
           <a:p>
             <a:fld id="{E9CC885B-4903-4D54-9A93-00025F12DED9}" type="datetimeFigureOut">
               <a:rPr kumimoji="1" lang="ja-JP" altLang="en-US" smtClean="0"/>
-              <a:t>2024/11/19</a:t>
+              <a:t>2025/4/9</a:t>
             </a:fld>
             <a:endParaRPr kumimoji="1" lang="ja-JP" altLang="en-US"/>
           </a:p>
@@ -969,7 +969,7 @@
           <a:p>
             <a:fld id="{E9CC885B-4903-4D54-9A93-00025F12DED9}" type="datetimeFigureOut">
               <a:rPr kumimoji="1" lang="ja-JP" altLang="en-US" smtClean="0"/>
-              <a:t>2024/11/19</a:t>
+              <a:t>2025/4/9</a:t>
             </a:fld>
             <a:endParaRPr kumimoji="1" lang="ja-JP" altLang="en-US"/>
           </a:p>
@@ -1244,7 +1244,7 @@
           <a:p>
             <a:fld id="{E9CC885B-4903-4D54-9A93-00025F12DED9}" type="datetimeFigureOut">
               <a:rPr kumimoji="1" lang="ja-JP" altLang="en-US" smtClean="0"/>
-              <a:t>2024/11/19</a:t>
+              <a:t>2025/4/9</a:t>
             </a:fld>
             <a:endParaRPr kumimoji="1" lang="ja-JP" altLang="en-US"/>
           </a:p>
@@ -1573,7 +1573,7 @@
           <a:p>
             <a:fld id="{E9CC885B-4903-4D54-9A93-00025F12DED9}" type="datetimeFigureOut">
               <a:rPr kumimoji="1" lang="ja-JP" altLang="en-US" smtClean="0"/>
-              <a:t>2024/11/19</a:t>
+              <a:t>2025/4/9</a:t>
             </a:fld>
             <a:endParaRPr kumimoji="1" lang="ja-JP" altLang="en-US"/>
           </a:p>
@@ -2049,7 +2049,7 @@
           <a:p>
             <a:fld id="{E9CC885B-4903-4D54-9A93-00025F12DED9}" type="datetimeFigureOut">
               <a:rPr kumimoji="1" lang="ja-JP" altLang="en-US" smtClean="0"/>
-              <a:t>2024/11/19</a:t>
+              <a:t>2025/4/9</a:t>
             </a:fld>
             <a:endParaRPr kumimoji="1" lang="ja-JP" altLang="en-US"/>
           </a:p>
@@ -2190,7 +2190,7 @@
           <a:p>
             <a:fld id="{E9CC885B-4903-4D54-9A93-00025F12DED9}" type="datetimeFigureOut">
               <a:rPr kumimoji="1" lang="ja-JP" altLang="en-US" smtClean="0"/>
-              <a:t>2024/11/19</a:t>
+              <a:t>2025/4/9</a:t>
             </a:fld>
             <a:endParaRPr kumimoji="1" lang="ja-JP" altLang="en-US"/>
           </a:p>
@@ -2303,7 +2303,7 @@
           <a:p>
             <a:fld id="{E9CC885B-4903-4D54-9A93-00025F12DED9}" type="datetimeFigureOut">
               <a:rPr kumimoji="1" lang="ja-JP" altLang="en-US" smtClean="0"/>
-              <a:t>2024/11/19</a:t>
+              <a:t>2025/4/9</a:t>
             </a:fld>
             <a:endParaRPr kumimoji="1" lang="ja-JP" altLang="en-US"/>
           </a:p>
@@ -2646,7 +2646,7 @@
           <a:p>
             <a:fld id="{E9CC885B-4903-4D54-9A93-00025F12DED9}" type="datetimeFigureOut">
               <a:rPr kumimoji="1" lang="ja-JP" altLang="en-US" smtClean="0"/>
-              <a:t>2024/11/19</a:t>
+              <a:t>2025/4/9</a:t>
             </a:fld>
             <a:endParaRPr kumimoji="1" lang="ja-JP" altLang="en-US"/>
           </a:p>
@@ -2934,7 +2934,7 @@
           <a:p>
             <a:fld id="{E9CC885B-4903-4D54-9A93-00025F12DED9}" type="datetimeFigureOut">
               <a:rPr kumimoji="1" lang="ja-JP" altLang="en-US" smtClean="0"/>
-              <a:t>2024/11/19</a:t>
+              <a:t>2025/4/9</a:t>
             </a:fld>
             <a:endParaRPr kumimoji="1" lang="ja-JP" altLang="en-US"/>
           </a:p>
@@ -3207,7 +3207,7 @@
           <a:p>
             <a:fld id="{E9CC885B-4903-4D54-9A93-00025F12DED9}" type="datetimeFigureOut">
               <a:rPr kumimoji="1" lang="ja-JP" altLang="en-US" smtClean="0"/>
-              <a:t>2024/11/19</a:t>
+              <a:t>2025/4/9</a:t>
             </a:fld>
             <a:endParaRPr kumimoji="1" lang="ja-JP" altLang="en-US"/>
           </a:p>
@@ -3922,8 +3922,8 @@
           </a:p>
         </p:txBody>
       </p:sp>
-      <mc:AlternateContent xmlns:mc="http://schemas.openxmlformats.org/markup-compatibility/2006">
-        <mc:Choice xmlns:a14="http://schemas.microsoft.com/office/drawing/2010/main" Requires="a14">
+      <mc:AlternateContent xmlns:mc="http://schemas.openxmlformats.org/markup-compatibility/2006" xmlns:a14="http://schemas.microsoft.com/office/drawing/2010/main">
+        <mc:Choice Requires="a14">
           <p:sp>
             <p:nvSpPr>
               <p:cNvPr id="6" name="テキスト ボックス 5">
@@ -3976,13 +3976,7 @@
                       <a:rPr lang="en-US" altLang="ja-JP" sz="2400" i="1" dirty="0" smtClean="0">
                         <a:latin typeface="Cambria Math" panose="02040503050406030204" pitchFamily="18" charset="0"/>
                       </a:rPr>
-                      <m:t>30</m:t>
-                    </m:r>
-                    <m:r>
-                      <a:rPr lang="en-US" altLang="ja-JP" sz="2400" i="1" dirty="0" smtClean="0">
-                        <a:latin typeface="Cambria Math" panose="02040503050406030204" pitchFamily="18" charset="0"/>
-                      </a:rPr>
-                      <m:t>°</m:t>
+                      <m:t>30°</m:t>
                     </m:r>
                   </m:oMath>
                 </a14:m>
@@ -4150,7 +4144,7 @@
             </p:txBody>
           </p:sp>
         </mc:Choice>
-        <mc:Fallback>
+        <mc:Fallback xmlns="">
           <p:sp>
             <p:nvSpPr>
               <p:cNvPr id="6" name="テキスト ボックス 5">
@@ -4261,8 +4255,8 @@
           </a:p>
         </p:txBody>
       </p:sp>
-      <mc:AlternateContent xmlns:mc="http://schemas.openxmlformats.org/markup-compatibility/2006">
-        <mc:Choice xmlns:a14="http://schemas.microsoft.com/office/drawing/2010/main" Requires="a14">
+      <mc:AlternateContent xmlns:mc="http://schemas.openxmlformats.org/markup-compatibility/2006" xmlns:a14="http://schemas.microsoft.com/office/drawing/2010/main">
+        <mc:Choice Requires="a14">
           <p:sp>
             <p:nvSpPr>
               <p:cNvPr id="6" name="テキスト ボックス 5">
@@ -4318,7 +4312,7 @@
             </p:txBody>
           </p:sp>
         </mc:Choice>
-        <mc:Fallback>
+        <mc:Fallback xmlns="">
           <p:sp>
             <p:nvSpPr>
               <p:cNvPr id="6" name="テキスト ボックス 5">
@@ -4916,8 +4910,8 @@
           </a:p>
         </p:txBody>
       </p:sp>
-      <mc:AlternateContent xmlns:mc="http://schemas.openxmlformats.org/markup-compatibility/2006">
-        <mc:Choice xmlns:a14="http://schemas.microsoft.com/office/drawing/2010/main" Requires="a14">
+      <mc:AlternateContent xmlns:mc="http://schemas.openxmlformats.org/markup-compatibility/2006" xmlns:a14="http://schemas.microsoft.com/office/drawing/2010/main">
+        <mc:Choice Requires="a14">
           <p:sp>
             <p:nvSpPr>
               <p:cNvPr id="6" name="テキスト ボックス 5">
@@ -5287,7 +5281,7 @@
             </p:txBody>
           </p:sp>
         </mc:Choice>
-        <mc:Fallback>
+        <mc:Fallback xmlns="">
           <p:sp>
             <p:nvSpPr>
               <p:cNvPr id="6" name="テキスト ボックス 5">
@@ -5398,8 +5392,8 @@
           </a:p>
         </p:txBody>
       </p:sp>
-      <mc:AlternateContent xmlns:mc="http://schemas.openxmlformats.org/markup-compatibility/2006">
-        <mc:Choice xmlns:a14="http://schemas.microsoft.com/office/drawing/2010/main" Requires="a14">
+      <mc:AlternateContent xmlns:mc="http://schemas.openxmlformats.org/markup-compatibility/2006" xmlns:a14="http://schemas.microsoft.com/office/drawing/2010/main">
+        <mc:Choice Requires="a14">
           <p:sp>
             <p:nvSpPr>
               <p:cNvPr id="6" name="テキスト ボックス 5">
@@ -5848,13 +5842,7 @@
                                 <a:rPr lang="en-US" altLang="ja-JP" sz="2400" i="1">
                                   <a:latin typeface="Cambria Math" panose="02040503050406030204" pitchFamily="18" charset="0"/>
                                 </a:rPr>
-                                <m:t>30</m:t>
-                              </m:r>
-                              <m:r>
-                                <a:rPr lang="en-US" altLang="ja-JP" sz="2400" i="1">
-                                  <a:latin typeface="Cambria Math" panose="02040503050406030204" pitchFamily="18" charset="0"/>
-                                </a:rPr>
-                                <m:t>°</m:t>
+                                <m:t>30°</m:t>
                               </m:r>
                             </m:e>
                             <m:e>
@@ -5920,7 +5908,7 @@
             </p:txBody>
           </p:sp>
         </mc:Choice>
-        <mc:Fallback>
+        <mc:Fallback xmlns="">
           <p:sp>
             <p:nvSpPr>
               <p:cNvPr id="6" name="テキスト ボックス 5">
@@ -6083,8 +6071,8 @@
           </a:p>
         </p:txBody>
       </p:sp>
-      <mc:AlternateContent xmlns:mc="http://schemas.openxmlformats.org/markup-compatibility/2006">
-        <mc:Choice xmlns:a14="http://schemas.microsoft.com/office/drawing/2010/main" Requires="a14">
+      <mc:AlternateContent xmlns:mc="http://schemas.openxmlformats.org/markup-compatibility/2006" xmlns:a14="http://schemas.microsoft.com/office/drawing/2010/main">
+        <mc:Choice Requires="a14">
           <p:sp>
             <p:nvSpPr>
               <p:cNvPr id="6" name="テキスト ボックス 5">
@@ -6455,7 +6443,7 @@
             </p:txBody>
           </p:sp>
         </mc:Choice>
-        <mc:Fallback>
+        <mc:Fallback xmlns="">
           <p:sp>
             <p:nvSpPr>
               <p:cNvPr id="6" name="テキスト ボックス 5">
@@ -6566,8 +6554,8 @@
           </a:p>
         </p:txBody>
       </p:sp>
-      <mc:AlternateContent xmlns:mc="http://schemas.openxmlformats.org/markup-compatibility/2006">
-        <mc:Choice xmlns:a14="http://schemas.microsoft.com/office/drawing/2010/main" Requires="a14">
+      <mc:AlternateContent xmlns:mc="http://schemas.openxmlformats.org/markup-compatibility/2006" xmlns:a14="http://schemas.microsoft.com/office/drawing/2010/main">
+        <mc:Choice Requires="a14">
           <p:sp>
             <p:nvSpPr>
               <p:cNvPr id="6" name="テキスト ボックス 5">
@@ -6892,13 +6880,7 @@
                                 <a:rPr lang="en-US" altLang="ja-JP" sz="2400" i="1">
                                   <a:latin typeface="Cambria Math" panose="02040503050406030204" pitchFamily="18" charset="0"/>
                                 </a:rPr>
-                                <m:t>30</m:t>
-                              </m:r>
-                              <m:r>
-                                <a:rPr lang="en-US" altLang="ja-JP" sz="2400" i="1">
-                                  <a:latin typeface="Cambria Math" panose="02040503050406030204" pitchFamily="18" charset="0"/>
-                                </a:rPr>
-                                <m:t>°</m:t>
+                                <m:t>30°</m:t>
                               </m:r>
                             </m:e>
                             <m:e>
@@ -7072,7 +7054,7 @@
             </p:txBody>
           </p:sp>
         </mc:Choice>
-        <mc:Fallback>
+        <mc:Fallback xmlns="">
           <p:sp>
             <p:nvSpPr>
               <p:cNvPr id="6" name="テキスト ボックス 5">
@@ -7235,8 +7217,8 @@
           </a:p>
         </p:txBody>
       </p:sp>
-      <mc:AlternateContent xmlns:mc="http://schemas.openxmlformats.org/markup-compatibility/2006">
-        <mc:Choice xmlns:a14="http://schemas.microsoft.com/office/drawing/2010/main" Requires="a14">
+      <mc:AlternateContent xmlns:mc="http://schemas.openxmlformats.org/markup-compatibility/2006" xmlns:a14="http://schemas.microsoft.com/office/drawing/2010/main">
+        <mc:Choice Requires="a14">
           <p:sp>
             <p:nvSpPr>
               <p:cNvPr id="6" name="テキスト ボックス 5">
@@ -7809,7 +7791,7 @@
             </p:txBody>
           </p:sp>
         </mc:Choice>
-        <mc:Fallback>
+        <mc:Fallback xmlns="">
           <p:sp>
             <p:nvSpPr>
               <p:cNvPr id="6" name="テキスト ボックス 5">
@@ -7920,8 +7902,8 @@
           </a:p>
         </p:txBody>
       </p:sp>
-      <mc:AlternateContent xmlns:mc="http://schemas.openxmlformats.org/markup-compatibility/2006">
-        <mc:Choice xmlns:a14="http://schemas.microsoft.com/office/drawing/2010/main" Requires="a14">
+      <mc:AlternateContent xmlns:mc="http://schemas.openxmlformats.org/markup-compatibility/2006" xmlns:a14="http://schemas.microsoft.com/office/drawing/2010/main">
+        <mc:Choice Requires="a14">
           <p:sp>
             <p:nvSpPr>
               <p:cNvPr id="6" name="テキスト ボックス 5">
@@ -8280,13 +8262,7 @@
                                 <a:rPr lang="en-US" altLang="ja-JP" sz="2400" i="1">
                                   <a:latin typeface="Cambria Math" panose="02040503050406030204" pitchFamily="18" charset="0"/>
                                 </a:rPr>
-                                <m:t>30</m:t>
-                              </m:r>
-                              <m:r>
-                                <a:rPr lang="en-US" altLang="ja-JP" sz="2400" i="1">
-                                  <a:latin typeface="Cambria Math" panose="02040503050406030204" pitchFamily="18" charset="0"/>
-                                </a:rPr>
-                                <m:t>°</m:t>
+                                <m:t>30°</m:t>
                               </m:r>
                             </m:e>
                             <m:e>
@@ -8332,13 +8308,7 @@
                                 <a:rPr lang="en-US" altLang="ja-JP" sz="2400" i="1">
                                   <a:latin typeface="Cambria Math" panose="02040503050406030204" pitchFamily="18" charset="0"/>
                                 </a:rPr>
-                                <m:t>30</m:t>
-                              </m:r>
-                              <m:r>
-                                <a:rPr lang="en-US" altLang="ja-JP" sz="2400" i="1">
-                                  <a:latin typeface="Cambria Math" panose="02040503050406030204" pitchFamily="18" charset="0"/>
-                                </a:rPr>
-                                <m:t>°</m:t>
+                                <m:t>30°</m:t>
                               </m:r>
                             </m:e>
                             <m:e>
@@ -8446,7 +8416,7 @@
             </p:txBody>
           </p:sp>
         </mc:Choice>
-        <mc:Fallback>
+        <mc:Fallback xmlns="">
           <p:sp>
             <p:nvSpPr>
               <p:cNvPr id="6" name="テキスト ボックス 5">
@@ -8557,8 +8527,8 @@
           </a:p>
         </p:txBody>
       </p:sp>
-      <mc:AlternateContent xmlns:mc="http://schemas.openxmlformats.org/markup-compatibility/2006">
-        <mc:Choice xmlns:a14="http://schemas.microsoft.com/office/drawing/2010/main" Requires="a14">
+      <mc:AlternateContent xmlns:mc="http://schemas.openxmlformats.org/markup-compatibility/2006" xmlns:a14="http://schemas.microsoft.com/office/drawing/2010/main">
+        <mc:Choice Requires="a14">
           <p:sp>
             <p:nvSpPr>
               <p:cNvPr id="6" name="テキスト ボックス 5">
@@ -9043,7 +9013,7 @@
             </p:txBody>
           </p:sp>
         </mc:Choice>
-        <mc:Fallback>
+        <mc:Fallback xmlns="">
           <p:sp>
             <p:nvSpPr>
               <p:cNvPr id="6" name="テキスト ボックス 5">
@@ -9171,7 +9141,7 @@
             <p:spPr>
               <a:xfrm>
                 <a:off x="567542" y="1216429"/>
-                <a:ext cx="10567316" cy="2206438"/>
+                <a:ext cx="10448758" cy="2575898"/>
               </a:xfrm>
               <a:prstGeom prst="rect">
                 <a:avLst/>
@@ -9198,19 +9168,26 @@
                   <a:rPr lang="ja-JP" altLang="en-US" sz="2400" dirty="0"/>
                   <a:t>にある画像の頂点を</a:t>
                 </a:r>
+                <a:endParaRPr lang="en-US" altLang="ja-JP" sz="2400" dirty="0"/>
+              </a:p>
+              <a:p>
+                <a:r>
+                  <a:rPr lang="ja-JP" altLang="en-US" sz="2400" dirty="0"/>
+                  <a:t>原点を</a:t>
+                </a:r>
                 <a14:m>
                   <m:oMath xmlns:m="http://schemas.openxmlformats.org/officeDocument/2006/math">
                     <m:r>
-                      <a:rPr lang="en-US" altLang="ja-JP" sz="2400" i="1" dirty="0" smtClean="0">
+                      <a:rPr lang="ja-JP" altLang="en-US" sz="2400" i="1" dirty="0">
                         <a:latin typeface="Cambria Math" panose="02040503050406030204" pitchFamily="18" charset="0"/>
                       </a:rPr>
-                      <m:t>20</m:t>
+                      <m:t>中心に</m:t>
                     </m:r>
                     <m:r>
                       <a:rPr lang="en-US" altLang="ja-JP" sz="2400" i="1" dirty="0" smtClean="0">
                         <a:latin typeface="Cambria Math" panose="02040503050406030204" pitchFamily="18" charset="0"/>
                       </a:rPr>
-                      <m:t>°</m:t>
+                      <m:t>20°</m:t>
                     </m:r>
                   </m:oMath>
                 </a14:m>
@@ -10046,7 +10023,7 @@
             <p:spPr>
               <a:xfrm>
                 <a:off x="567542" y="1216429"/>
-                <a:ext cx="10567316" cy="2206438"/>
+                <a:ext cx="10448758" cy="2575898"/>
               </a:xfrm>
               <a:prstGeom prst="rect">
                 <a:avLst/>
@@ -10054,7 +10031,7 @@
               <a:blipFill>
                 <a:blip r:embed="rId2"/>
                 <a:stretch>
-                  <a:fillRect l="-865" t="-2216"/>
+                  <a:fillRect l="-875" t="-1896"/>
                 </a:stretch>
               </a:blipFill>
             </p:spPr>

--- a/ゲーム科2年/00_前期/ゲーム開発Ⅰ/ゲーム数学Ⅱ/座学/10_回転行列.pptx
+++ b/ゲーム科2年/00_前期/ゲーム開発Ⅰ/ゲーム数学Ⅱ/座学/10_回転行列.pptx
@@ -269,7 +269,7 @@
           <a:p>
             <a:fld id="{E9CC885B-4903-4D54-9A93-00025F12DED9}" type="datetimeFigureOut">
               <a:rPr kumimoji="1" lang="ja-JP" altLang="en-US" smtClean="0"/>
-              <a:t>2025/4/9</a:t>
+              <a:t>2026/5/7</a:t>
             </a:fld>
             <a:endParaRPr kumimoji="1" lang="ja-JP" altLang="en-US"/>
           </a:p>
@@ -499,7 +499,7 @@
           <a:p>
             <a:fld id="{E9CC885B-4903-4D54-9A93-00025F12DED9}" type="datetimeFigureOut">
               <a:rPr kumimoji="1" lang="ja-JP" altLang="en-US" smtClean="0"/>
-              <a:t>2025/4/9</a:t>
+              <a:t>2026/5/7</a:t>
             </a:fld>
             <a:endParaRPr kumimoji="1" lang="ja-JP" altLang="en-US"/>
           </a:p>
@@ -739,7 +739,7 @@
           <a:p>
             <a:fld id="{E9CC885B-4903-4D54-9A93-00025F12DED9}" type="datetimeFigureOut">
               <a:rPr kumimoji="1" lang="ja-JP" altLang="en-US" smtClean="0"/>
-              <a:t>2025/4/9</a:t>
+              <a:t>2026/5/7</a:t>
             </a:fld>
             <a:endParaRPr kumimoji="1" lang="ja-JP" altLang="en-US"/>
           </a:p>
@@ -969,7 +969,7 @@
           <a:p>
             <a:fld id="{E9CC885B-4903-4D54-9A93-00025F12DED9}" type="datetimeFigureOut">
               <a:rPr kumimoji="1" lang="ja-JP" altLang="en-US" smtClean="0"/>
-              <a:t>2025/4/9</a:t>
+              <a:t>2026/5/7</a:t>
             </a:fld>
             <a:endParaRPr kumimoji="1" lang="ja-JP" altLang="en-US"/>
           </a:p>
@@ -1244,7 +1244,7 @@
           <a:p>
             <a:fld id="{E9CC885B-4903-4D54-9A93-00025F12DED9}" type="datetimeFigureOut">
               <a:rPr kumimoji="1" lang="ja-JP" altLang="en-US" smtClean="0"/>
-              <a:t>2025/4/9</a:t>
+              <a:t>2026/5/7</a:t>
             </a:fld>
             <a:endParaRPr kumimoji="1" lang="ja-JP" altLang="en-US"/>
           </a:p>
@@ -1573,7 +1573,7 @@
           <a:p>
             <a:fld id="{E9CC885B-4903-4D54-9A93-00025F12DED9}" type="datetimeFigureOut">
               <a:rPr kumimoji="1" lang="ja-JP" altLang="en-US" smtClean="0"/>
-              <a:t>2025/4/9</a:t>
+              <a:t>2026/5/7</a:t>
             </a:fld>
             <a:endParaRPr kumimoji="1" lang="ja-JP" altLang="en-US"/>
           </a:p>
@@ -2049,7 +2049,7 @@
           <a:p>
             <a:fld id="{E9CC885B-4903-4D54-9A93-00025F12DED9}" type="datetimeFigureOut">
               <a:rPr kumimoji="1" lang="ja-JP" altLang="en-US" smtClean="0"/>
-              <a:t>2025/4/9</a:t>
+              <a:t>2026/5/7</a:t>
             </a:fld>
             <a:endParaRPr kumimoji="1" lang="ja-JP" altLang="en-US"/>
           </a:p>
@@ -2190,7 +2190,7 @@
           <a:p>
             <a:fld id="{E9CC885B-4903-4D54-9A93-00025F12DED9}" type="datetimeFigureOut">
               <a:rPr kumimoji="1" lang="ja-JP" altLang="en-US" smtClean="0"/>
-              <a:t>2025/4/9</a:t>
+              <a:t>2026/5/7</a:t>
             </a:fld>
             <a:endParaRPr kumimoji="1" lang="ja-JP" altLang="en-US"/>
           </a:p>
@@ -2303,7 +2303,7 @@
           <a:p>
             <a:fld id="{E9CC885B-4903-4D54-9A93-00025F12DED9}" type="datetimeFigureOut">
               <a:rPr kumimoji="1" lang="ja-JP" altLang="en-US" smtClean="0"/>
-              <a:t>2025/4/9</a:t>
+              <a:t>2026/5/7</a:t>
             </a:fld>
             <a:endParaRPr kumimoji="1" lang="ja-JP" altLang="en-US"/>
           </a:p>
@@ -2646,7 +2646,7 @@
           <a:p>
             <a:fld id="{E9CC885B-4903-4D54-9A93-00025F12DED9}" type="datetimeFigureOut">
               <a:rPr kumimoji="1" lang="ja-JP" altLang="en-US" smtClean="0"/>
-              <a:t>2025/4/9</a:t>
+              <a:t>2026/5/7</a:t>
             </a:fld>
             <a:endParaRPr kumimoji="1" lang="ja-JP" altLang="en-US"/>
           </a:p>
@@ -2934,7 +2934,7 @@
           <a:p>
             <a:fld id="{E9CC885B-4903-4D54-9A93-00025F12DED9}" type="datetimeFigureOut">
               <a:rPr kumimoji="1" lang="ja-JP" altLang="en-US" smtClean="0"/>
-              <a:t>2025/4/9</a:t>
+              <a:t>2026/5/7</a:t>
             </a:fld>
             <a:endParaRPr kumimoji="1" lang="ja-JP" altLang="en-US"/>
           </a:p>
@@ -3207,7 +3207,7 @@
           <a:p>
             <a:fld id="{E9CC885B-4903-4D54-9A93-00025F12DED9}" type="datetimeFigureOut">
               <a:rPr kumimoji="1" lang="ja-JP" altLang="en-US" smtClean="0"/>
-              <a:t>2025/4/9</a:t>
+              <a:t>2026/5/7</a:t>
             </a:fld>
             <a:endParaRPr kumimoji="1" lang="ja-JP" altLang="en-US"/>
           </a:p>
@@ -9141,7 +9141,7 @@
             <p:spPr>
               <a:xfrm>
                 <a:off x="567542" y="1216429"/>
-                <a:ext cx="10448758" cy="2575898"/>
+                <a:ext cx="10633104" cy="2575898"/>
               </a:xfrm>
               <a:prstGeom prst="rect">
                 <a:avLst/>
@@ -9948,29 +9948,26 @@
                           <m:mr>
                             <m:e>
                               <m:r>
-                                <m:rPr>
-                                  <m:brk m:alnAt="7"/>
-                                </m:rPr>
-                                <a:rPr lang="en-US" altLang="ja-JP" sz="2400" b="1" i="1">
+                                <a:rPr lang="en-US" altLang="ja-JP" sz="2400" b="1" i="1" smtClean="0">
                                   <a:solidFill>
                                     <a:srgbClr val="FF0000"/>
                                   </a:solidFill>
                                   <a:latin typeface="Cambria Math" panose="02040503050406030204" pitchFamily="18" charset="0"/>
                                 </a:rPr>
-                                <m:t>𝒙</m:t>
+                                <m:t>𝟏𝟎</m:t>
                               </m:r>
                             </m:e>
                           </m:mr>
                           <m:mr>
                             <m:e>
                               <m:r>
-                                <a:rPr lang="en-US" altLang="ja-JP" sz="2400" b="1" i="1">
+                                <a:rPr lang="en-US" altLang="ja-JP" sz="2400" b="1" i="1" smtClean="0">
                                   <a:solidFill>
                                     <a:srgbClr val="FF0000"/>
                                   </a:solidFill>
                                   <a:latin typeface="Cambria Math" panose="02040503050406030204" pitchFamily="18" charset="0"/>
                                 </a:rPr>
-                                <m:t>𝒚</m:t>
+                                <m:t>𝟐𝟎</m:t>
                               </m:r>
                             </m:e>
                           </m:mr>
@@ -10023,7 +10020,7 @@
             <p:spPr>
               <a:xfrm>
                 <a:off x="567542" y="1216429"/>
-                <a:ext cx="10448758" cy="2575898"/>
+                <a:ext cx="10633104" cy="2575898"/>
               </a:xfrm>
               <a:prstGeom prst="rect">
                 <a:avLst/>
@@ -10031,7 +10028,7 @@
               <a:blipFill>
                 <a:blip r:embed="rId2"/>
                 <a:stretch>
-                  <a:fillRect l="-875" t="-1896"/>
+                  <a:fillRect l="-860" t="-1896"/>
                 </a:stretch>
               </a:blipFill>
             </p:spPr>
